--- a/docs/CEM_AI_Conversion.pptx
+++ b/docs/CEM_AI_Conversion.pptx
@@ -12845,7 +12845,7 @@
                 </a:solidFill>
                 <a:latin typeface="Segoe UI"/>
               </a:rPr>
-              <a:t>Two separate engines read each page: Marker for layout and tables, MinerU for the equations.</a:t>
+              <a:t>Marker reads the whole page (layout, tables, and equations). MinerU reads the equations again as an independent second opinion.</a:t>
             </a:r>
           </a:p>
         </p:txBody>
@@ -13385,7 +13385,7 @@
                 </a:solidFill>
                 <a:latin typeface="Segoe UI"/>
               </a:rPr>
-              <a:t>If both engines agree and pass, accept. Otherwise take a single passing result, or move to self-correction.</a:t>
+              <a:t>For each equation, if the two readings agree and pass the checks, accept. Otherwise take a single passing reading, or self-correct.</a:t>
             </a:r>
           </a:p>
         </p:txBody>
@@ -15989,7 +15989,7 @@
                 </a:solidFill>
                 <a:latin typeface="Segoe UI"/>
               </a:rPr>
-              <a:t>Both engines agree and pass</a:t>
+              <a:t>Both engine readings agree</a:t>
             </a:r>
           </a:p>
         </p:txBody>
@@ -16214,7 +16214,7 @@
                 </a:solidFill>
                 <a:latin typeface="Segoe UI"/>
               </a:rPr>
-              <a:t>One result passes the checks</a:t>
+              <a:t>One reading passes the checks</a:t>
             </a:r>
           </a:p>
         </p:txBody>
